--- a/Prezentatsiya_dlya_zaschity_LSh_SPb_Frunzik_Mkrtchan.pptx
+++ b/Prezentatsiya_dlya_zaschity_LSh_SPb_Frunzik_Mkrtchan.pptx
@@ -318,6 +318,11 @@
       </a:defRPr>
     </a:lvl9pPr>
   </p:defaultTextStyle>
+  <p:extLst>
+    <p:ext uri="{EFAFB233-063F-42B5-8137-9DF3F51BA10A}">
+      <p15:sldGuideLst xmlns:p15="http://schemas.microsoft.com/office/powerpoint/2012/main"/>
+    </p:ext>
+  </p:extLst>
 </p:presentation>
 </file>
 
@@ -577,7 +582,7 @@
           </a:ln>
           <a:extLst>
             <a:ext uri="{C572A759-6A51-4108-AA02-DFA0A04FC94B}">
-              <ma14:wrappingTextBoxFlag xmlns:ma14="http://schemas.microsoft.com/office/mac/drawingml/2011/main" xmlns:a14="http://schemas.microsoft.com/office/drawing/2010/main" xmlns:m="http://schemas.openxmlformats.org/officeDocument/2006/math" xmlns="" val="1"/>
+              <ma14:wrappingTextBoxFlag xmlns="" xmlns:m="http://schemas.openxmlformats.org/officeDocument/2006/math" xmlns:a14="http://schemas.microsoft.com/office/drawing/2010/main" xmlns:ma14="http://schemas.microsoft.com/office/mac/drawingml/2011/main" val="1"/>
             </a:ext>
           </a:extLst>
         </p:spPr>
@@ -614,7 +619,7 @@
           </a:ln>
           <a:extLst>
             <a:ext uri="{C572A759-6A51-4108-AA02-DFA0A04FC94B}">
-              <ma14:wrappingTextBoxFlag xmlns:ma14="http://schemas.microsoft.com/office/mac/drawingml/2011/main" xmlns:a14="http://schemas.microsoft.com/office/drawing/2010/main" xmlns:m="http://schemas.openxmlformats.org/officeDocument/2006/math" xmlns="" val="1"/>
+              <ma14:wrappingTextBoxFlag xmlns="" xmlns:m="http://schemas.openxmlformats.org/officeDocument/2006/math" xmlns:a14="http://schemas.microsoft.com/office/drawing/2010/main" xmlns:ma14="http://schemas.microsoft.com/office/mac/drawingml/2011/main" val="1"/>
             </a:ext>
           </a:extLst>
         </p:spPr>
@@ -1505,7 +1510,7 @@
           </a:ln>
           <a:extLst>
             <a:ext uri="{C572A759-6A51-4108-AA02-DFA0A04FC94B}">
-              <ma14:wrappingTextBoxFlag xmlns:ma14="http://schemas.microsoft.com/office/mac/drawingml/2011/main" xmlns:a14="http://schemas.microsoft.com/office/drawing/2010/main" xmlns:m="http://schemas.openxmlformats.org/officeDocument/2006/math" xmlns="" val="1"/>
+              <ma14:wrappingTextBoxFlag xmlns="" xmlns:m="http://schemas.openxmlformats.org/officeDocument/2006/math" xmlns:a14="http://schemas.microsoft.com/office/drawing/2010/main" xmlns:ma14="http://schemas.microsoft.com/office/mac/drawingml/2011/main" val="1"/>
             </a:ext>
           </a:extLst>
         </p:spPr>
@@ -1581,7 +1586,7 @@
           </a:ln>
           <a:extLst>
             <a:ext uri="{C572A759-6A51-4108-AA02-DFA0A04FC94B}">
-              <ma14:wrappingTextBoxFlag xmlns:ma14="http://schemas.microsoft.com/office/mac/drawingml/2011/main" xmlns:a14="http://schemas.microsoft.com/office/drawing/2010/main" xmlns:m="http://schemas.openxmlformats.org/officeDocument/2006/math" xmlns="" val="1"/>
+              <ma14:wrappingTextBoxFlag xmlns="" xmlns:m="http://schemas.openxmlformats.org/officeDocument/2006/math" xmlns:a14="http://schemas.microsoft.com/office/drawing/2010/main" xmlns:ma14="http://schemas.microsoft.com/office/mac/drawingml/2011/main" val="1"/>
             </a:ext>
           </a:extLst>
         </p:spPr>
@@ -1651,7 +1656,7 @@
           </a:ln>
           <a:extLst>
             <a:ext uri="{C572A759-6A51-4108-AA02-DFA0A04FC94B}">
-              <ma14:wrappingTextBoxFlag xmlns:ma14="http://schemas.microsoft.com/office/mac/drawingml/2011/main" xmlns:a14="http://schemas.microsoft.com/office/drawing/2010/main" xmlns:m="http://schemas.openxmlformats.org/officeDocument/2006/math" xmlns="" val="1"/>
+              <ma14:wrappingTextBoxFlag xmlns="" xmlns:m="http://schemas.openxmlformats.org/officeDocument/2006/math" xmlns:a14="http://schemas.microsoft.com/office/drawing/2010/main" xmlns:ma14="http://schemas.microsoft.com/office/mac/drawingml/2011/main" val="1"/>
             </a:ext>
           </a:extLst>
         </p:spPr>
@@ -1825,7 +1830,7 @@
           </a:ln>
           <a:extLst>
             <a:ext uri="{C572A759-6A51-4108-AA02-DFA0A04FC94B}">
-              <ma14:wrappingTextBoxFlag xmlns:ma14="http://schemas.microsoft.com/office/mac/drawingml/2011/main" xmlns:a14="http://schemas.microsoft.com/office/drawing/2010/main" xmlns:m="http://schemas.openxmlformats.org/officeDocument/2006/math" xmlns="" val="1"/>
+              <ma14:wrappingTextBoxFlag xmlns="" xmlns:m="http://schemas.openxmlformats.org/officeDocument/2006/math" xmlns:a14="http://schemas.microsoft.com/office/drawing/2010/main" xmlns:ma14="http://schemas.microsoft.com/office/mac/drawingml/2011/main" val="1"/>
             </a:ext>
           </a:extLst>
         </p:spPr>
@@ -1908,7 +1913,7 @@
           </a:ln>
           <a:extLst>
             <a:ext uri="{C572A759-6A51-4108-AA02-DFA0A04FC94B}">
-              <ma14:wrappingTextBoxFlag xmlns:ma14="http://schemas.microsoft.com/office/mac/drawingml/2011/main" xmlns:a14="http://schemas.microsoft.com/office/drawing/2010/main" xmlns:m="http://schemas.openxmlformats.org/officeDocument/2006/math" xmlns="" val="1"/>
+              <ma14:wrappingTextBoxFlag xmlns="" xmlns:m="http://schemas.openxmlformats.org/officeDocument/2006/math" xmlns:a14="http://schemas.microsoft.com/office/drawing/2010/main" xmlns:ma14="http://schemas.microsoft.com/office/mac/drawingml/2011/main" val="1"/>
             </a:ext>
           </a:extLst>
         </p:spPr>
@@ -1962,7 +1967,7 @@
           </a:ln>
           <a:extLst>
             <a:ext uri="{C572A759-6A51-4108-AA02-DFA0A04FC94B}">
-              <ma14:wrappingTextBoxFlag xmlns:ma14="http://schemas.microsoft.com/office/mac/drawingml/2011/main" xmlns:a14="http://schemas.microsoft.com/office/drawing/2010/main" xmlns:m="http://schemas.openxmlformats.org/officeDocument/2006/math" xmlns="" val="1"/>
+              <ma14:wrappingTextBoxFlag xmlns="" xmlns:m="http://schemas.openxmlformats.org/officeDocument/2006/math" xmlns:a14="http://schemas.microsoft.com/office/drawing/2010/main" xmlns:ma14="http://schemas.microsoft.com/office/mac/drawingml/2011/main" val="1"/>
             </a:ext>
           </a:extLst>
         </p:spPr>
@@ -2024,7 +2029,7 @@
           </a:ln>
           <a:extLst>
             <a:ext uri="{C572A759-6A51-4108-AA02-DFA0A04FC94B}">
-              <ma14:wrappingTextBoxFlag xmlns:ma14="http://schemas.microsoft.com/office/mac/drawingml/2011/main" xmlns:a14="http://schemas.microsoft.com/office/drawing/2010/main" xmlns:m="http://schemas.openxmlformats.org/officeDocument/2006/math" xmlns="" val="1"/>
+              <ma14:wrappingTextBoxFlag xmlns="" xmlns:m="http://schemas.openxmlformats.org/officeDocument/2006/math" xmlns:a14="http://schemas.microsoft.com/office/drawing/2010/main" xmlns:ma14="http://schemas.microsoft.com/office/mac/drawingml/2011/main" val="1"/>
             </a:ext>
           </a:extLst>
         </p:spPr>
@@ -2078,7 +2083,7 @@
           </a:ln>
           <a:extLst>
             <a:ext uri="{C572A759-6A51-4108-AA02-DFA0A04FC94B}">
-              <ma14:wrappingTextBoxFlag xmlns:ma14="http://schemas.microsoft.com/office/mac/drawingml/2011/main" xmlns:a14="http://schemas.microsoft.com/office/drawing/2010/main" xmlns:m="http://schemas.openxmlformats.org/officeDocument/2006/math" xmlns="" val="1"/>
+              <ma14:wrappingTextBoxFlag xmlns="" xmlns:m="http://schemas.openxmlformats.org/officeDocument/2006/math" xmlns:a14="http://schemas.microsoft.com/office/drawing/2010/main" xmlns:ma14="http://schemas.microsoft.com/office/mac/drawingml/2011/main" val="1"/>
             </a:ext>
           </a:extLst>
         </p:spPr>
@@ -2136,7 +2141,7 @@
           </a:ln>
           <a:extLst>
             <a:ext uri="{C572A759-6A51-4108-AA02-DFA0A04FC94B}">
-              <ma14:wrappingTextBoxFlag xmlns:ma14="http://schemas.microsoft.com/office/mac/drawingml/2011/main" xmlns:a14="http://schemas.microsoft.com/office/drawing/2010/main" xmlns:m="http://schemas.openxmlformats.org/officeDocument/2006/math" xmlns="" val="1"/>
+              <ma14:wrappingTextBoxFlag xmlns="" xmlns:m="http://schemas.openxmlformats.org/officeDocument/2006/math" xmlns:a14="http://schemas.microsoft.com/office/drawing/2010/main" xmlns:ma14="http://schemas.microsoft.com/office/mac/drawingml/2011/main" val="1"/>
             </a:ext>
           </a:extLst>
         </p:spPr>
@@ -2189,7 +2194,7 @@
           </a:ln>
           <a:extLst>
             <a:ext uri="{C572A759-6A51-4108-AA02-DFA0A04FC94B}">
-              <ma14:wrappingTextBoxFlag xmlns:ma14="http://schemas.microsoft.com/office/mac/drawingml/2011/main" xmlns:a14="http://schemas.microsoft.com/office/drawing/2010/main" xmlns:m="http://schemas.openxmlformats.org/officeDocument/2006/math" xmlns="" val="1"/>
+              <ma14:wrappingTextBoxFlag xmlns="" xmlns:m="http://schemas.openxmlformats.org/officeDocument/2006/math" xmlns:a14="http://schemas.microsoft.com/office/drawing/2010/main" xmlns:ma14="http://schemas.microsoft.com/office/mac/drawingml/2011/main" val="1"/>
             </a:ext>
           </a:extLst>
         </p:spPr>
@@ -2243,7 +2248,7 @@
           </a:ln>
           <a:extLst>
             <a:ext uri="{C572A759-6A51-4108-AA02-DFA0A04FC94B}">
-              <ma14:wrappingTextBoxFlag xmlns:ma14="http://schemas.microsoft.com/office/mac/drawingml/2011/main" xmlns:a14="http://schemas.microsoft.com/office/drawing/2010/main" xmlns:m="http://schemas.openxmlformats.org/officeDocument/2006/math" xmlns="" val="1"/>
+              <ma14:wrappingTextBoxFlag xmlns="" xmlns:m="http://schemas.openxmlformats.org/officeDocument/2006/math" xmlns:a14="http://schemas.microsoft.com/office/drawing/2010/main" xmlns:ma14="http://schemas.microsoft.com/office/mac/drawingml/2011/main" val="1"/>
             </a:ext>
           </a:extLst>
         </p:spPr>
@@ -2301,7 +2306,7 @@
           </a:ln>
           <a:extLst>
             <a:ext uri="{C572A759-6A51-4108-AA02-DFA0A04FC94B}">
-              <ma14:wrappingTextBoxFlag xmlns:ma14="http://schemas.microsoft.com/office/mac/drawingml/2011/main" xmlns:a14="http://schemas.microsoft.com/office/drawing/2010/main" xmlns:m="http://schemas.openxmlformats.org/officeDocument/2006/math" xmlns="" val="1"/>
+              <ma14:wrappingTextBoxFlag xmlns="" xmlns:m="http://schemas.openxmlformats.org/officeDocument/2006/math" xmlns:a14="http://schemas.microsoft.com/office/drawing/2010/main" xmlns:ma14="http://schemas.microsoft.com/office/mac/drawingml/2011/main" val="1"/>
             </a:ext>
           </a:extLst>
         </p:spPr>
@@ -2355,7 +2360,7 @@
           </a:ln>
           <a:extLst>
             <a:ext uri="{C572A759-6A51-4108-AA02-DFA0A04FC94B}">
-              <ma14:wrappingTextBoxFlag xmlns:ma14="http://schemas.microsoft.com/office/mac/drawingml/2011/main" xmlns:a14="http://schemas.microsoft.com/office/drawing/2010/main" xmlns:m="http://schemas.openxmlformats.org/officeDocument/2006/math" xmlns="" val="1"/>
+              <ma14:wrappingTextBoxFlag xmlns="" xmlns:m="http://schemas.openxmlformats.org/officeDocument/2006/math" xmlns:a14="http://schemas.microsoft.com/office/drawing/2010/main" xmlns:ma14="http://schemas.microsoft.com/office/mac/drawingml/2011/main" val="1"/>
             </a:ext>
           </a:extLst>
         </p:spPr>
@@ -2413,7 +2418,7 @@
           </a:ln>
           <a:extLst>
             <a:ext uri="{C572A759-6A51-4108-AA02-DFA0A04FC94B}">
-              <ma14:wrappingTextBoxFlag xmlns:ma14="http://schemas.microsoft.com/office/mac/drawingml/2011/main" xmlns:a14="http://schemas.microsoft.com/office/drawing/2010/main" xmlns:m="http://schemas.openxmlformats.org/officeDocument/2006/math" xmlns="" val="1"/>
+              <ma14:wrappingTextBoxFlag xmlns="" xmlns:m="http://schemas.openxmlformats.org/officeDocument/2006/math" xmlns:a14="http://schemas.microsoft.com/office/drawing/2010/main" xmlns:ma14="http://schemas.microsoft.com/office/mac/drawingml/2011/main" val="1"/>
             </a:ext>
           </a:extLst>
         </p:spPr>
@@ -2494,7 +2499,7 @@
           </a:ln>
           <a:extLst>
             <a:ext uri="{C572A759-6A51-4108-AA02-DFA0A04FC94B}">
-              <ma14:wrappingTextBoxFlag xmlns:ma14="http://schemas.microsoft.com/office/mac/drawingml/2011/main" xmlns:a14="http://schemas.microsoft.com/office/drawing/2010/main" xmlns:m="http://schemas.openxmlformats.org/officeDocument/2006/math" xmlns="" val="1"/>
+              <ma14:wrappingTextBoxFlag xmlns="" xmlns:m="http://schemas.openxmlformats.org/officeDocument/2006/math" xmlns:a14="http://schemas.microsoft.com/office/drawing/2010/main" xmlns:ma14="http://schemas.microsoft.com/office/mac/drawingml/2011/main" val="1"/>
             </a:ext>
           </a:extLst>
         </p:spPr>
@@ -2546,7 +2551,7 @@
           </a:ln>
           <a:extLst>
             <a:ext uri="{C572A759-6A51-4108-AA02-DFA0A04FC94B}">
-              <ma14:wrappingTextBoxFlag xmlns:ma14="http://schemas.microsoft.com/office/mac/drawingml/2011/main" xmlns:a14="http://schemas.microsoft.com/office/drawing/2010/main" xmlns:m="http://schemas.openxmlformats.org/officeDocument/2006/math" xmlns="" val="1"/>
+              <ma14:wrappingTextBoxFlag xmlns="" xmlns:m="http://schemas.openxmlformats.org/officeDocument/2006/math" xmlns:a14="http://schemas.microsoft.com/office/drawing/2010/main" xmlns:ma14="http://schemas.microsoft.com/office/mac/drawingml/2011/main" val="1"/>
             </a:ext>
           </a:extLst>
         </p:spPr>
@@ -2611,14 +2616,13 @@
               </a:ext>
             </a:extLst>
           </a:blip>
-          <a:stretch>
-            <a:fillRect/>
-          </a:stretch>
+          <a:srcRect/>
+          <a:stretch/>
         </p:blipFill>
         <p:spPr>
           <a:xfrm>
             <a:off x="4974485" y="1223962"/>
-            <a:ext cx="3810002" cy="2857502"/>
+            <a:ext cx="3810002" cy="2857501"/>
           </a:xfrm>
           <a:prstGeom prst="rect">
             <a:avLst/>
@@ -2678,7 +2682,7 @@
           </a:ln>
           <a:extLst>
             <a:ext uri="{C572A759-6A51-4108-AA02-DFA0A04FC94B}">
-              <ma14:wrappingTextBoxFlag xmlns:ma14="http://schemas.microsoft.com/office/mac/drawingml/2011/main" xmlns:a14="http://schemas.microsoft.com/office/drawing/2010/main" xmlns:m="http://schemas.openxmlformats.org/officeDocument/2006/math" xmlns="" val="1"/>
+              <ma14:wrappingTextBoxFlag xmlns="" xmlns:m="http://schemas.openxmlformats.org/officeDocument/2006/math" xmlns:a14="http://schemas.microsoft.com/office/drawing/2010/main" xmlns:ma14="http://schemas.microsoft.com/office/mac/drawingml/2011/main" val="1"/>
             </a:ext>
           </a:extLst>
         </p:spPr>
@@ -2730,7 +2734,7 @@
           </a:ln>
           <a:extLst>
             <a:ext uri="{C572A759-6A51-4108-AA02-DFA0A04FC94B}">
-              <ma14:wrappingTextBoxFlag xmlns:ma14="http://schemas.microsoft.com/office/mac/drawingml/2011/main" xmlns:a14="http://schemas.microsoft.com/office/drawing/2010/main" xmlns:m="http://schemas.openxmlformats.org/officeDocument/2006/math" xmlns="" val="1"/>
+              <ma14:wrappingTextBoxFlag xmlns="" xmlns:m="http://schemas.openxmlformats.org/officeDocument/2006/math" xmlns:a14="http://schemas.microsoft.com/office/drawing/2010/main" xmlns:ma14="http://schemas.microsoft.com/office/mac/drawingml/2011/main" val="1"/>
             </a:ext>
           </a:extLst>
         </p:spPr>
@@ -2792,7 +2796,7 @@
           </a:ln>
           <a:extLst>
             <a:ext uri="{C572A759-6A51-4108-AA02-DFA0A04FC94B}">
-              <ma14:wrappingTextBoxFlag xmlns:ma14="http://schemas.microsoft.com/office/mac/drawingml/2011/main" xmlns:a14="http://schemas.microsoft.com/office/drawing/2010/main" xmlns:m="http://schemas.openxmlformats.org/officeDocument/2006/math" xmlns="" val="1"/>
+              <ma14:wrappingTextBoxFlag xmlns="" xmlns:m="http://schemas.openxmlformats.org/officeDocument/2006/math" xmlns:a14="http://schemas.microsoft.com/office/drawing/2010/main" xmlns:ma14="http://schemas.microsoft.com/office/mac/drawingml/2011/main" val="1"/>
             </a:ext>
           </a:extLst>
         </p:spPr>
@@ -2886,7 +2890,7 @@
           </a:ln>
           <a:extLst>
             <a:ext uri="{C572A759-6A51-4108-AA02-DFA0A04FC94B}">
-              <ma14:wrappingTextBoxFlag xmlns:ma14="http://schemas.microsoft.com/office/mac/drawingml/2011/main" xmlns:a14="http://schemas.microsoft.com/office/drawing/2010/main" xmlns:m="http://schemas.openxmlformats.org/officeDocument/2006/math" xmlns="" val="1"/>
+              <ma14:wrappingTextBoxFlag xmlns="" xmlns:m="http://schemas.openxmlformats.org/officeDocument/2006/math" xmlns:a14="http://schemas.microsoft.com/office/drawing/2010/main" xmlns:ma14="http://schemas.microsoft.com/office/mac/drawingml/2011/main" val="1"/>
             </a:ext>
           </a:extLst>
         </p:spPr>
@@ -2969,7 +2973,7 @@
           </a:ln>
           <a:extLst>
             <a:ext uri="{C572A759-6A51-4108-AA02-DFA0A04FC94B}">
-              <ma14:wrappingTextBoxFlag xmlns:ma14="http://schemas.microsoft.com/office/mac/drawingml/2011/main" xmlns:a14="http://schemas.microsoft.com/office/drawing/2010/main" xmlns:m="http://schemas.openxmlformats.org/officeDocument/2006/math" xmlns="" val="1"/>
+              <ma14:wrappingTextBoxFlag xmlns="" xmlns:m="http://schemas.openxmlformats.org/officeDocument/2006/math" xmlns:a14="http://schemas.microsoft.com/office/drawing/2010/main" xmlns:ma14="http://schemas.microsoft.com/office/mac/drawingml/2011/main" val="1"/>
             </a:ext>
           </a:extLst>
         </p:spPr>
@@ -3178,7 +3182,7 @@
           </a:ln>
           <a:extLst>
             <a:ext uri="{C572A759-6A51-4108-AA02-DFA0A04FC94B}">
-              <ma14:wrappingTextBoxFlag xmlns:ma14="http://schemas.microsoft.com/office/mac/drawingml/2011/main" xmlns:a14="http://schemas.microsoft.com/office/drawing/2010/main" xmlns:m="http://schemas.openxmlformats.org/officeDocument/2006/math" xmlns="" val="1"/>
+              <ma14:wrappingTextBoxFlag xmlns="" xmlns:m="http://schemas.openxmlformats.org/officeDocument/2006/math" xmlns:a14="http://schemas.microsoft.com/office/drawing/2010/main" xmlns:ma14="http://schemas.microsoft.com/office/mac/drawingml/2011/main" val="1"/>
             </a:ext>
           </a:extLst>
         </p:spPr>
@@ -3230,7 +3234,7 @@
           </a:ln>
           <a:extLst>
             <a:ext uri="{C572A759-6A51-4108-AA02-DFA0A04FC94B}">
-              <ma14:wrappingTextBoxFlag xmlns:ma14="http://schemas.microsoft.com/office/mac/drawingml/2011/main" xmlns:a14="http://schemas.microsoft.com/office/drawing/2010/main" xmlns:m="http://schemas.openxmlformats.org/officeDocument/2006/math" xmlns="" val="1"/>
+              <ma14:wrappingTextBoxFlag xmlns="" xmlns:m="http://schemas.openxmlformats.org/officeDocument/2006/math" xmlns:a14="http://schemas.microsoft.com/office/drawing/2010/main" xmlns:ma14="http://schemas.microsoft.com/office/mac/drawingml/2011/main" val="1"/>
             </a:ext>
           </a:extLst>
         </p:spPr>
@@ -3284,7 +3288,7 @@
           </a:ln>
           <a:extLst>
             <a:ext uri="{C572A759-6A51-4108-AA02-DFA0A04FC94B}">
-              <ma14:wrappingTextBoxFlag xmlns:ma14="http://schemas.microsoft.com/office/mac/drawingml/2011/main" xmlns:a14="http://schemas.microsoft.com/office/drawing/2010/main" xmlns:m="http://schemas.openxmlformats.org/officeDocument/2006/math" xmlns="" val="1"/>
+              <ma14:wrappingTextBoxFlag xmlns="" xmlns:m="http://schemas.openxmlformats.org/officeDocument/2006/math" xmlns:a14="http://schemas.microsoft.com/office/drawing/2010/main" xmlns:ma14="http://schemas.microsoft.com/office/mac/drawingml/2011/main" val="1"/>
             </a:ext>
           </a:extLst>
         </p:spPr>
@@ -3374,7 +3378,7 @@
           </a:ln>
           <a:extLst>
             <a:ext uri="{C572A759-6A51-4108-AA02-DFA0A04FC94B}">
-              <ma14:wrappingTextBoxFlag xmlns:ma14="http://schemas.microsoft.com/office/mac/drawingml/2011/main" xmlns:a14="http://schemas.microsoft.com/office/drawing/2010/main" xmlns:m="http://schemas.openxmlformats.org/officeDocument/2006/math" xmlns="" val="1"/>
+              <ma14:wrappingTextBoxFlag xmlns="" xmlns:m="http://schemas.openxmlformats.org/officeDocument/2006/math" xmlns:a14="http://schemas.microsoft.com/office/drawing/2010/main" xmlns:ma14="http://schemas.microsoft.com/office/mac/drawingml/2011/main" val="1"/>
             </a:ext>
           </a:extLst>
         </p:spPr>
@@ -3428,7 +3432,7 @@
           </a:ln>
           <a:extLst>
             <a:ext uri="{C572A759-6A51-4108-AA02-DFA0A04FC94B}">
-              <ma14:wrappingTextBoxFlag xmlns:ma14="http://schemas.microsoft.com/office/mac/drawingml/2011/main" xmlns:a14="http://schemas.microsoft.com/office/drawing/2010/main" xmlns:m="http://schemas.openxmlformats.org/officeDocument/2006/math" xmlns="" val="1"/>
+              <ma14:wrappingTextBoxFlag xmlns="" xmlns:m="http://schemas.openxmlformats.org/officeDocument/2006/math" xmlns:a14="http://schemas.microsoft.com/office/drawing/2010/main" xmlns:ma14="http://schemas.microsoft.com/office/mac/drawingml/2011/main" val="1"/>
             </a:ext>
           </a:extLst>
         </p:spPr>
@@ -3494,7 +3498,7 @@
           </a:ln>
           <a:extLst>
             <a:ext uri="{C572A759-6A51-4108-AA02-DFA0A04FC94B}">
-              <ma14:wrappingTextBoxFlag xmlns:ma14="http://schemas.microsoft.com/office/mac/drawingml/2011/main" xmlns:a14="http://schemas.microsoft.com/office/drawing/2010/main" xmlns:m="http://schemas.openxmlformats.org/officeDocument/2006/math" xmlns="" val="1"/>
+              <ma14:wrappingTextBoxFlag xmlns="" xmlns:m="http://schemas.openxmlformats.org/officeDocument/2006/math" xmlns:a14="http://schemas.microsoft.com/office/drawing/2010/main" xmlns:ma14="http://schemas.microsoft.com/office/mac/drawingml/2011/main" val="1"/>
             </a:ext>
           </a:extLst>
         </p:spPr>
@@ -3548,7 +3552,7 @@
           </a:ln>
           <a:extLst>
             <a:ext uri="{C572A759-6A51-4108-AA02-DFA0A04FC94B}">
-              <ma14:wrappingTextBoxFlag xmlns:ma14="http://schemas.microsoft.com/office/mac/drawingml/2011/main" xmlns:a14="http://schemas.microsoft.com/office/drawing/2010/main" xmlns:m="http://schemas.openxmlformats.org/officeDocument/2006/math" xmlns="" val="1"/>
+              <ma14:wrappingTextBoxFlag xmlns="" xmlns:m="http://schemas.openxmlformats.org/officeDocument/2006/math" xmlns:a14="http://schemas.microsoft.com/office/drawing/2010/main" xmlns:ma14="http://schemas.microsoft.com/office/mac/drawingml/2011/main" val="1"/>
             </a:ext>
           </a:extLst>
         </p:spPr>
@@ -3651,7 +3655,7 @@
           </a:ln>
           <a:extLst>
             <a:ext uri="{C572A759-6A51-4108-AA02-DFA0A04FC94B}">
-              <ma14:wrappingTextBoxFlag xmlns:ma14="http://schemas.microsoft.com/office/mac/drawingml/2011/main" xmlns:a14="http://schemas.microsoft.com/office/drawing/2010/main" xmlns:m="http://schemas.openxmlformats.org/officeDocument/2006/math" xmlns="" val="1"/>
+              <ma14:wrappingTextBoxFlag xmlns="" xmlns:m="http://schemas.openxmlformats.org/officeDocument/2006/math" xmlns:a14="http://schemas.microsoft.com/office/drawing/2010/main" xmlns:ma14="http://schemas.microsoft.com/office/mac/drawingml/2011/main" val="1"/>
             </a:ext>
           </a:extLst>
         </p:spPr>
@@ -3734,7 +3738,7 @@
           </a:ln>
           <a:extLst>
             <a:ext uri="{C572A759-6A51-4108-AA02-DFA0A04FC94B}">
-              <ma14:wrappingTextBoxFlag xmlns:ma14="http://schemas.microsoft.com/office/mac/drawingml/2011/main" xmlns:a14="http://schemas.microsoft.com/office/drawing/2010/main" xmlns:m="http://schemas.openxmlformats.org/officeDocument/2006/math" xmlns="" val="1"/>
+              <ma14:wrappingTextBoxFlag xmlns="" xmlns:m="http://schemas.openxmlformats.org/officeDocument/2006/math" xmlns:a14="http://schemas.microsoft.com/office/drawing/2010/main" xmlns:ma14="http://schemas.microsoft.com/office/mac/drawingml/2011/main" val="1"/>
             </a:ext>
           </a:extLst>
         </p:spPr>
@@ -3870,7 +3874,7 @@
           </a:ln>
           <a:extLst>
             <a:ext uri="{C572A759-6A51-4108-AA02-DFA0A04FC94B}">
-              <ma14:wrappingTextBoxFlag xmlns:ma14="http://schemas.microsoft.com/office/mac/drawingml/2011/main" xmlns:a14="http://schemas.microsoft.com/office/drawing/2010/main" xmlns:m="http://schemas.openxmlformats.org/officeDocument/2006/math" xmlns="" val="1"/>
+              <ma14:wrappingTextBoxFlag xmlns="" xmlns:m="http://schemas.openxmlformats.org/officeDocument/2006/math" xmlns:a14="http://schemas.microsoft.com/office/drawing/2010/main" xmlns:ma14="http://schemas.microsoft.com/office/mac/drawingml/2011/main" val="1"/>
             </a:ext>
           </a:extLst>
         </p:spPr>
@@ -3922,7 +3926,7 @@
           </a:ln>
           <a:extLst>
             <a:ext uri="{C572A759-6A51-4108-AA02-DFA0A04FC94B}">
-              <ma14:wrappingTextBoxFlag xmlns:ma14="http://schemas.microsoft.com/office/mac/drawingml/2011/main" xmlns:a14="http://schemas.microsoft.com/office/drawing/2010/main" xmlns:m="http://schemas.openxmlformats.org/officeDocument/2006/math" xmlns="" val="1"/>
+              <ma14:wrappingTextBoxFlag xmlns="" xmlns:m="http://schemas.openxmlformats.org/officeDocument/2006/math" xmlns:a14="http://schemas.microsoft.com/office/drawing/2010/main" xmlns:ma14="http://schemas.microsoft.com/office/mac/drawingml/2011/main" val="1"/>
             </a:ext>
           </a:extLst>
         </p:spPr>
@@ -3976,7 +3980,7 @@
           </a:ln>
           <a:extLst>
             <a:ext uri="{C572A759-6A51-4108-AA02-DFA0A04FC94B}">
-              <ma14:wrappingTextBoxFlag xmlns:ma14="http://schemas.microsoft.com/office/mac/drawingml/2011/main" xmlns:a14="http://schemas.microsoft.com/office/drawing/2010/main" xmlns:m="http://schemas.openxmlformats.org/officeDocument/2006/math" xmlns="" val="1"/>
+              <ma14:wrappingTextBoxFlag xmlns="" xmlns:m="http://schemas.openxmlformats.org/officeDocument/2006/math" xmlns:a14="http://schemas.microsoft.com/office/drawing/2010/main" xmlns:ma14="http://schemas.microsoft.com/office/mac/drawingml/2011/main" val="1"/>
             </a:ext>
           </a:extLst>
         </p:spPr>
@@ -4030,7 +4034,7 @@
           </a:ln>
           <a:extLst>
             <a:ext uri="{C572A759-6A51-4108-AA02-DFA0A04FC94B}">
-              <ma14:wrappingTextBoxFlag xmlns:ma14="http://schemas.microsoft.com/office/mac/drawingml/2011/main" xmlns:a14="http://schemas.microsoft.com/office/drawing/2010/main" xmlns:m="http://schemas.openxmlformats.org/officeDocument/2006/math" xmlns="" val="1"/>
+              <ma14:wrappingTextBoxFlag xmlns="" xmlns:m="http://schemas.openxmlformats.org/officeDocument/2006/math" xmlns:a14="http://schemas.microsoft.com/office/drawing/2010/main" xmlns:ma14="http://schemas.microsoft.com/office/mac/drawingml/2011/main" val="1"/>
             </a:ext>
           </a:extLst>
         </p:spPr>
@@ -4084,7 +4088,7 @@
           </a:ln>
           <a:extLst>
             <a:ext uri="{C572A759-6A51-4108-AA02-DFA0A04FC94B}">
-              <ma14:wrappingTextBoxFlag xmlns:ma14="http://schemas.microsoft.com/office/mac/drawingml/2011/main" xmlns:a14="http://schemas.microsoft.com/office/drawing/2010/main" xmlns:m="http://schemas.openxmlformats.org/officeDocument/2006/math" xmlns="" val="1"/>
+              <ma14:wrappingTextBoxFlag xmlns="" xmlns:m="http://schemas.openxmlformats.org/officeDocument/2006/math" xmlns:a14="http://schemas.microsoft.com/office/drawing/2010/main" xmlns:ma14="http://schemas.microsoft.com/office/mac/drawingml/2011/main" val="1"/>
             </a:ext>
           </a:extLst>
         </p:spPr>
@@ -4138,7 +4142,7 @@
           </a:ln>
           <a:extLst>
             <a:ext uri="{C572A759-6A51-4108-AA02-DFA0A04FC94B}">
-              <ma14:wrappingTextBoxFlag xmlns:ma14="http://schemas.microsoft.com/office/mac/drawingml/2011/main" xmlns:a14="http://schemas.microsoft.com/office/drawing/2010/main" xmlns:m="http://schemas.openxmlformats.org/officeDocument/2006/math" xmlns="" val="1"/>
+              <ma14:wrappingTextBoxFlag xmlns="" xmlns:m="http://schemas.openxmlformats.org/officeDocument/2006/math" xmlns:a14="http://schemas.microsoft.com/office/drawing/2010/main" xmlns:ma14="http://schemas.microsoft.com/office/mac/drawingml/2011/main" val="1"/>
             </a:ext>
           </a:extLst>
         </p:spPr>
@@ -4192,7 +4196,7 @@
           </a:ln>
           <a:extLst>
             <a:ext uri="{C572A759-6A51-4108-AA02-DFA0A04FC94B}">
-              <ma14:wrappingTextBoxFlag xmlns:ma14="http://schemas.microsoft.com/office/mac/drawingml/2011/main" xmlns:a14="http://schemas.microsoft.com/office/drawing/2010/main" xmlns:m="http://schemas.openxmlformats.org/officeDocument/2006/math" xmlns="" val="1"/>
+              <ma14:wrappingTextBoxFlag xmlns="" xmlns:m="http://schemas.openxmlformats.org/officeDocument/2006/math" xmlns:a14="http://schemas.microsoft.com/office/drawing/2010/main" xmlns:ma14="http://schemas.microsoft.com/office/mac/drawingml/2011/main" val="1"/>
             </a:ext>
           </a:extLst>
         </p:spPr>
@@ -4273,7 +4277,7 @@
           </a:ln>
           <a:extLst>
             <a:ext uri="{C572A759-6A51-4108-AA02-DFA0A04FC94B}">
-              <ma14:wrappingTextBoxFlag xmlns:ma14="http://schemas.microsoft.com/office/mac/drawingml/2011/main" xmlns:a14="http://schemas.microsoft.com/office/drawing/2010/main" xmlns:m="http://schemas.openxmlformats.org/officeDocument/2006/math" xmlns="" val="1"/>
+              <ma14:wrappingTextBoxFlag xmlns="" xmlns:m="http://schemas.openxmlformats.org/officeDocument/2006/math" xmlns:a14="http://schemas.microsoft.com/office/drawing/2010/main" xmlns:ma14="http://schemas.microsoft.com/office/mac/drawingml/2011/main" val="1"/>
             </a:ext>
           </a:extLst>
         </p:spPr>
@@ -4356,7 +4360,7 @@
           </a:ln>
           <a:extLst>
             <a:ext uri="{C572A759-6A51-4108-AA02-DFA0A04FC94B}">
-              <ma14:wrappingTextBoxFlag xmlns:ma14="http://schemas.microsoft.com/office/mac/drawingml/2011/main" xmlns:a14="http://schemas.microsoft.com/office/drawing/2010/main" xmlns:m="http://schemas.openxmlformats.org/officeDocument/2006/math" xmlns="" val="1"/>
+              <ma14:wrappingTextBoxFlag xmlns="" xmlns:m="http://schemas.openxmlformats.org/officeDocument/2006/math" xmlns:a14="http://schemas.microsoft.com/office/drawing/2010/main" xmlns:ma14="http://schemas.microsoft.com/office/mac/drawingml/2011/main" val="1"/>
             </a:ext>
           </a:extLst>
         </p:spPr>
@@ -4528,7 +4532,7 @@
           </a:ln>
           <a:extLst>
             <a:ext uri="{C572A759-6A51-4108-AA02-DFA0A04FC94B}">
-              <ma14:wrappingTextBoxFlag xmlns:ma14="http://schemas.microsoft.com/office/mac/drawingml/2011/main" xmlns:a14="http://schemas.microsoft.com/office/drawing/2010/main" xmlns:m="http://schemas.openxmlformats.org/officeDocument/2006/math" xmlns="" val="1"/>
+              <ma14:wrappingTextBoxFlag xmlns="" xmlns:m="http://schemas.openxmlformats.org/officeDocument/2006/math" xmlns:a14="http://schemas.microsoft.com/office/drawing/2010/main" xmlns:ma14="http://schemas.microsoft.com/office/mac/drawingml/2011/main" val="1"/>
             </a:ext>
           </a:extLst>
         </p:spPr>
@@ -4607,7 +4611,7 @@
           </a:ln>
           <a:extLst>
             <a:ext uri="{C572A759-6A51-4108-AA02-DFA0A04FC94B}">
-              <ma14:wrappingTextBoxFlag xmlns:ma14="http://schemas.microsoft.com/office/mac/drawingml/2011/main" xmlns:a14="http://schemas.microsoft.com/office/drawing/2010/main" xmlns:m="http://schemas.openxmlformats.org/officeDocument/2006/math" xmlns="" val="1"/>
+              <ma14:wrappingTextBoxFlag xmlns="" xmlns:m="http://schemas.openxmlformats.org/officeDocument/2006/math" xmlns:a14="http://schemas.microsoft.com/office/drawing/2010/main" xmlns:ma14="http://schemas.microsoft.com/office/mac/drawingml/2011/main" val="1"/>
             </a:ext>
           </a:extLst>
         </p:spPr>
@@ -4845,7 +4849,7 @@
           </a:ln>
           <a:extLst>
             <a:ext uri="{C572A759-6A51-4108-AA02-DFA0A04FC94B}">
-              <ma14:wrappingTextBoxFlag xmlns:ma14="http://schemas.microsoft.com/office/mac/drawingml/2011/main" xmlns:a14="http://schemas.microsoft.com/office/drawing/2010/main" xmlns:m="http://schemas.openxmlformats.org/officeDocument/2006/math" xmlns="" val="1"/>
+              <ma14:wrappingTextBoxFlag xmlns="" xmlns:m="http://schemas.openxmlformats.org/officeDocument/2006/math" xmlns:a14="http://schemas.microsoft.com/office/drawing/2010/main" xmlns:ma14="http://schemas.microsoft.com/office/mac/drawingml/2011/main" val="1"/>
             </a:ext>
           </a:extLst>
         </p:spPr>
@@ -4897,7 +4901,7 @@
           </a:ln>
           <a:extLst>
             <a:ext uri="{C572A759-6A51-4108-AA02-DFA0A04FC94B}">
-              <ma14:wrappingTextBoxFlag xmlns:ma14="http://schemas.microsoft.com/office/mac/drawingml/2011/main" xmlns:a14="http://schemas.microsoft.com/office/drawing/2010/main" xmlns:m="http://schemas.openxmlformats.org/officeDocument/2006/math" xmlns="" val="1"/>
+              <ma14:wrappingTextBoxFlag xmlns="" xmlns:m="http://schemas.openxmlformats.org/officeDocument/2006/math" xmlns:a14="http://schemas.microsoft.com/office/drawing/2010/main" xmlns:ma14="http://schemas.microsoft.com/office/mac/drawingml/2011/main" val="1"/>
             </a:ext>
           </a:extLst>
         </p:spPr>
@@ -4949,7 +4953,7 @@
           </a:ln>
           <a:extLst>
             <a:ext uri="{C572A759-6A51-4108-AA02-DFA0A04FC94B}">
-              <ma14:wrappingTextBoxFlag xmlns:ma14="http://schemas.microsoft.com/office/mac/drawingml/2011/main" xmlns:a14="http://schemas.microsoft.com/office/drawing/2010/main" xmlns:m="http://schemas.openxmlformats.org/officeDocument/2006/math" xmlns="" val="1"/>
+              <ma14:wrappingTextBoxFlag xmlns="" xmlns:m="http://schemas.openxmlformats.org/officeDocument/2006/math" xmlns:a14="http://schemas.microsoft.com/office/drawing/2010/main" xmlns:ma14="http://schemas.microsoft.com/office/mac/drawingml/2011/main" val="1"/>
             </a:ext>
           </a:extLst>
         </p:spPr>
@@ -5001,7 +5005,7 @@
           </a:ln>
           <a:extLst>
             <a:ext uri="{C572A759-6A51-4108-AA02-DFA0A04FC94B}">
-              <ma14:wrappingTextBoxFlag xmlns:ma14="http://schemas.microsoft.com/office/mac/drawingml/2011/main" xmlns:a14="http://schemas.microsoft.com/office/drawing/2010/main" xmlns:m="http://schemas.openxmlformats.org/officeDocument/2006/math" xmlns="" val="1"/>
+              <ma14:wrappingTextBoxFlag xmlns="" xmlns:m="http://schemas.openxmlformats.org/officeDocument/2006/math" xmlns:a14="http://schemas.microsoft.com/office/drawing/2010/main" xmlns:ma14="http://schemas.microsoft.com/office/mac/drawingml/2011/main" val="1"/>
             </a:ext>
           </a:extLst>
         </p:spPr>
@@ -5053,7 +5057,7 @@
           </a:ln>
           <a:extLst>
             <a:ext uri="{C572A759-6A51-4108-AA02-DFA0A04FC94B}">
-              <ma14:wrappingTextBoxFlag xmlns:ma14="http://schemas.microsoft.com/office/mac/drawingml/2011/main" xmlns:a14="http://schemas.microsoft.com/office/drawing/2010/main" xmlns:m="http://schemas.openxmlformats.org/officeDocument/2006/math" xmlns="" val="1"/>
+              <ma14:wrappingTextBoxFlag xmlns="" xmlns:m="http://schemas.openxmlformats.org/officeDocument/2006/math" xmlns:a14="http://schemas.microsoft.com/office/drawing/2010/main" xmlns:ma14="http://schemas.microsoft.com/office/mac/drawingml/2011/main" val="1"/>
             </a:ext>
           </a:extLst>
         </p:spPr>
@@ -5105,7 +5109,7 @@
           </a:ln>
           <a:extLst>
             <a:ext uri="{C572A759-6A51-4108-AA02-DFA0A04FC94B}">
-              <ma14:wrappingTextBoxFlag xmlns:ma14="http://schemas.microsoft.com/office/mac/drawingml/2011/main" xmlns:a14="http://schemas.microsoft.com/office/drawing/2010/main" xmlns:m="http://schemas.openxmlformats.org/officeDocument/2006/math" xmlns="" val="1"/>
+              <ma14:wrappingTextBoxFlag xmlns="" xmlns:m="http://schemas.openxmlformats.org/officeDocument/2006/math" xmlns:a14="http://schemas.microsoft.com/office/drawing/2010/main" xmlns:ma14="http://schemas.microsoft.com/office/mac/drawingml/2011/main" val="1"/>
             </a:ext>
           </a:extLst>
         </p:spPr>
@@ -5188,7 +5192,7 @@
           </a:ln>
           <a:extLst>
             <a:ext uri="{C572A759-6A51-4108-AA02-DFA0A04FC94B}">
-              <ma14:wrappingTextBoxFlag xmlns:ma14="http://schemas.microsoft.com/office/mac/drawingml/2011/main" xmlns:a14="http://schemas.microsoft.com/office/drawing/2010/main" xmlns:m="http://schemas.openxmlformats.org/officeDocument/2006/math" xmlns="" val="1"/>
+              <ma14:wrappingTextBoxFlag xmlns="" xmlns:m="http://schemas.openxmlformats.org/officeDocument/2006/math" xmlns:a14="http://schemas.microsoft.com/office/drawing/2010/main" xmlns:ma14="http://schemas.microsoft.com/office/mac/drawingml/2011/main" val="1"/>
             </a:ext>
           </a:extLst>
         </p:spPr>
@@ -5537,7 +5541,7 @@
           </a:ln>
           <a:extLst>
             <a:ext uri="{C572A759-6A51-4108-AA02-DFA0A04FC94B}">
-              <ma14:wrappingTextBoxFlag xmlns:ma14="http://schemas.microsoft.com/office/mac/drawingml/2011/main" xmlns:a14="http://schemas.microsoft.com/office/drawing/2010/main" xmlns:m="http://schemas.openxmlformats.org/officeDocument/2006/math" xmlns="" val="1"/>
+              <ma14:wrappingTextBoxFlag xmlns="" xmlns:m="http://schemas.openxmlformats.org/officeDocument/2006/math" xmlns:a14="http://schemas.microsoft.com/office/drawing/2010/main" xmlns:ma14="http://schemas.microsoft.com/office/mac/drawingml/2011/main" val="1"/>
             </a:ext>
           </a:extLst>
         </p:spPr>
@@ -5589,7 +5593,7 @@
           </a:ln>
           <a:extLst>
             <a:ext uri="{C572A759-6A51-4108-AA02-DFA0A04FC94B}">
-              <ma14:wrappingTextBoxFlag xmlns:ma14="http://schemas.microsoft.com/office/mac/drawingml/2011/main" xmlns:a14="http://schemas.microsoft.com/office/drawing/2010/main" xmlns:m="http://schemas.openxmlformats.org/officeDocument/2006/math" xmlns="" val="1"/>
+              <ma14:wrappingTextBoxFlag xmlns="" xmlns:m="http://schemas.openxmlformats.org/officeDocument/2006/math" xmlns:a14="http://schemas.microsoft.com/office/drawing/2010/main" xmlns:ma14="http://schemas.microsoft.com/office/mac/drawingml/2011/main" val="1"/>
             </a:ext>
           </a:extLst>
         </p:spPr>
@@ -5651,7 +5655,7 @@
           </a:ln>
           <a:extLst>
             <a:ext uri="{C572A759-6A51-4108-AA02-DFA0A04FC94B}">
-              <ma14:wrappingTextBoxFlag xmlns:ma14="http://schemas.microsoft.com/office/mac/drawingml/2011/main" xmlns:a14="http://schemas.microsoft.com/office/drawing/2010/main" xmlns:m="http://schemas.openxmlformats.org/officeDocument/2006/math" xmlns="" val="1"/>
+              <ma14:wrappingTextBoxFlag xmlns="" xmlns:m="http://schemas.openxmlformats.org/officeDocument/2006/math" xmlns:a14="http://schemas.microsoft.com/office/drawing/2010/main" xmlns:ma14="http://schemas.microsoft.com/office/mac/drawingml/2011/main" val="1"/>
             </a:ext>
           </a:extLst>
         </p:spPr>
@@ -5705,7 +5709,7 @@
           </a:ln>
           <a:extLst>
             <a:ext uri="{C572A759-6A51-4108-AA02-DFA0A04FC94B}">
-              <ma14:wrappingTextBoxFlag xmlns:ma14="http://schemas.microsoft.com/office/mac/drawingml/2011/main" xmlns:a14="http://schemas.microsoft.com/office/drawing/2010/main" xmlns:m="http://schemas.openxmlformats.org/officeDocument/2006/math" xmlns="" val="1"/>
+              <ma14:wrappingTextBoxFlag xmlns="" xmlns:m="http://schemas.openxmlformats.org/officeDocument/2006/math" xmlns:a14="http://schemas.microsoft.com/office/drawing/2010/main" xmlns:ma14="http://schemas.microsoft.com/office/mac/drawingml/2011/main" val="1"/>
             </a:ext>
           </a:extLst>
         </p:spPr>
@@ -5759,7 +5763,7 @@
           </a:ln>
           <a:extLst>
             <a:ext uri="{C572A759-6A51-4108-AA02-DFA0A04FC94B}">
-              <ma14:wrappingTextBoxFlag xmlns:ma14="http://schemas.microsoft.com/office/mac/drawingml/2011/main" xmlns:a14="http://schemas.microsoft.com/office/drawing/2010/main" xmlns:m="http://schemas.openxmlformats.org/officeDocument/2006/math" xmlns="" val="1"/>
+              <ma14:wrappingTextBoxFlag xmlns="" xmlns:m="http://schemas.openxmlformats.org/officeDocument/2006/math" xmlns:a14="http://schemas.microsoft.com/office/drawing/2010/main" xmlns:ma14="http://schemas.microsoft.com/office/mac/drawingml/2011/main" val="1"/>
             </a:ext>
           </a:extLst>
         </p:spPr>
@@ -5813,7 +5817,7 @@
           </a:ln>
           <a:extLst>
             <a:ext uri="{C572A759-6A51-4108-AA02-DFA0A04FC94B}">
-              <ma14:wrappingTextBoxFlag xmlns:ma14="http://schemas.microsoft.com/office/mac/drawingml/2011/main" xmlns:a14="http://schemas.microsoft.com/office/drawing/2010/main" xmlns:m="http://schemas.openxmlformats.org/officeDocument/2006/math" xmlns="" val="1"/>
+              <ma14:wrappingTextBoxFlag xmlns="" xmlns:m="http://schemas.openxmlformats.org/officeDocument/2006/math" xmlns:a14="http://schemas.microsoft.com/office/drawing/2010/main" xmlns:ma14="http://schemas.microsoft.com/office/mac/drawingml/2011/main" val="1"/>
             </a:ext>
           </a:extLst>
         </p:spPr>
@@ -5896,7 +5900,7 @@
           </a:ln>
           <a:extLst>
             <a:ext uri="{C572A759-6A51-4108-AA02-DFA0A04FC94B}">
-              <ma14:wrappingTextBoxFlag xmlns:ma14="http://schemas.microsoft.com/office/mac/drawingml/2011/main" xmlns:a14="http://schemas.microsoft.com/office/drawing/2010/main" xmlns:m="http://schemas.openxmlformats.org/officeDocument/2006/math" xmlns="" val="1"/>
+              <ma14:wrappingTextBoxFlag xmlns="" xmlns:m="http://schemas.openxmlformats.org/officeDocument/2006/math" xmlns:a14="http://schemas.microsoft.com/office/drawing/2010/main" xmlns:ma14="http://schemas.microsoft.com/office/mac/drawingml/2011/main" val="1"/>
             </a:ext>
           </a:extLst>
         </p:spPr>
@@ -5968,7 +5972,7 @@
           </a:ln>
           <a:extLst>
             <a:ext uri="{C572A759-6A51-4108-AA02-DFA0A04FC94B}">
-              <ma14:wrappingTextBoxFlag xmlns:ma14="http://schemas.microsoft.com/office/mac/drawingml/2011/main" xmlns:a14="http://schemas.microsoft.com/office/drawing/2010/main" xmlns:m="http://schemas.openxmlformats.org/officeDocument/2006/math" xmlns="" val="1"/>
+              <ma14:wrappingTextBoxFlag xmlns="" xmlns:m="http://schemas.openxmlformats.org/officeDocument/2006/math" xmlns:a14="http://schemas.microsoft.com/office/drawing/2010/main" xmlns:ma14="http://schemas.microsoft.com/office/mac/drawingml/2011/main" val="1"/>
             </a:ext>
           </a:extLst>
         </p:spPr>
@@ -6020,7 +6024,7 @@
           </a:ln>
           <a:extLst>
             <a:ext uri="{C572A759-6A51-4108-AA02-DFA0A04FC94B}">
-              <ma14:wrappingTextBoxFlag xmlns:ma14="http://schemas.microsoft.com/office/mac/drawingml/2011/main" xmlns:a14="http://schemas.microsoft.com/office/drawing/2010/main" xmlns:m="http://schemas.openxmlformats.org/officeDocument/2006/math" xmlns="" val="1"/>
+              <ma14:wrappingTextBoxFlag xmlns="" xmlns:m="http://schemas.openxmlformats.org/officeDocument/2006/math" xmlns:a14="http://schemas.microsoft.com/office/drawing/2010/main" xmlns:ma14="http://schemas.microsoft.com/office/mac/drawingml/2011/main" val="1"/>
             </a:ext>
           </a:extLst>
         </p:spPr>
@@ -6074,7 +6078,7 @@
           </a:ln>
           <a:extLst>
             <a:ext uri="{C572A759-6A51-4108-AA02-DFA0A04FC94B}">
-              <ma14:wrappingTextBoxFlag xmlns:ma14="http://schemas.microsoft.com/office/mac/drawingml/2011/main" xmlns:a14="http://schemas.microsoft.com/office/drawing/2010/main" xmlns:m="http://schemas.openxmlformats.org/officeDocument/2006/math" xmlns="" val="1"/>
+              <ma14:wrappingTextBoxFlag xmlns="" xmlns:m="http://schemas.openxmlformats.org/officeDocument/2006/math" xmlns:a14="http://schemas.microsoft.com/office/drawing/2010/main" xmlns:ma14="http://schemas.microsoft.com/office/mac/drawingml/2011/main" val="1"/>
             </a:ext>
           </a:extLst>
         </p:spPr>
@@ -6144,7 +6148,7 @@
           </a:ln>
           <a:extLst>
             <a:ext uri="{C572A759-6A51-4108-AA02-DFA0A04FC94B}">
-              <ma14:wrappingTextBoxFlag xmlns:ma14="http://schemas.microsoft.com/office/mac/drawingml/2011/main" xmlns:a14="http://schemas.microsoft.com/office/drawing/2010/main" xmlns:m="http://schemas.openxmlformats.org/officeDocument/2006/math" xmlns="" val="1"/>
+              <ma14:wrappingTextBoxFlag xmlns="" xmlns:m="http://schemas.openxmlformats.org/officeDocument/2006/math" xmlns:a14="http://schemas.microsoft.com/office/drawing/2010/main" xmlns:ma14="http://schemas.microsoft.com/office/mac/drawingml/2011/main" val="1"/>
             </a:ext>
           </a:extLst>
         </p:spPr>
@@ -6198,7 +6202,7 @@
           </a:ln>
           <a:extLst>
             <a:ext uri="{C572A759-6A51-4108-AA02-DFA0A04FC94B}">
-              <ma14:wrappingTextBoxFlag xmlns:ma14="http://schemas.microsoft.com/office/mac/drawingml/2011/main" xmlns:a14="http://schemas.microsoft.com/office/drawing/2010/main" xmlns:m="http://schemas.openxmlformats.org/officeDocument/2006/math" xmlns="" val="1"/>
+              <ma14:wrappingTextBoxFlag xmlns="" xmlns:m="http://schemas.openxmlformats.org/officeDocument/2006/math" xmlns:a14="http://schemas.microsoft.com/office/drawing/2010/main" xmlns:ma14="http://schemas.microsoft.com/office/mac/drawingml/2011/main" val="1"/>
             </a:ext>
           </a:extLst>
         </p:spPr>
@@ -6343,7 +6347,7 @@
           </a:ln>
           <a:extLst>
             <a:ext uri="{C572A759-6A51-4108-AA02-DFA0A04FC94B}">
-              <ma14:wrappingTextBoxFlag xmlns:ma14="http://schemas.microsoft.com/office/mac/drawingml/2011/main" xmlns:a14="http://schemas.microsoft.com/office/drawing/2010/main" xmlns:m="http://schemas.openxmlformats.org/officeDocument/2006/math" xmlns="" val="1"/>
+              <ma14:wrappingTextBoxFlag xmlns="" xmlns:m="http://schemas.openxmlformats.org/officeDocument/2006/math" xmlns:a14="http://schemas.microsoft.com/office/drawing/2010/main" xmlns:ma14="http://schemas.microsoft.com/office/mac/drawingml/2011/main" val="1"/>
             </a:ext>
           </a:extLst>
         </p:spPr>
@@ -6397,7 +6401,7 @@
           </a:ln>
           <a:extLst>
             <a:ext uri="{C572A759-6A51-4108-AA02-DFA0A04FC94B}">
-              <ma14:wrappingTextBoxFlag xmlns:ma14="http://schemas.microsoft.com/office/mac/drawingml/2011/main" xmlns:a14="http://schemas.microsoft.com/office/drawing/2010/main" xmlns:m="http://schemas.openxmlformats.org/officeDocument/2006/math" xmlns="" val="1"/>
+              <ma14:wrappingTextBoxFlag xmlns="" xmlns:m="http://schemas.openxmlformats.org/officeDocument/2006/math" xmlns:a14="http://schemas.microsoft.com/office/drawing/2010/main" xmlns:ma14="http://schemas.microsoft.com/office/mac/drawingml/2011/main" val="1"/>
             </a:ext>
           </a:extLst>
         </p:spPr>
@@ -6463,7 +6467,7 @@
           </a:ln>
           <a:extLst>
             <a:ext uri="{C572A759-6A51-4108-AA02-DFA0A04FC94B}">
-              <ma14:wrappingTextBoxFlag xmlns:ma14="http://schemas.microsoft.com/office/mac/drawingml/2011/main" xmlns:a14="http://schemas.microsoft.com/office/drawing/2010/main" xmlns:m="http://schemas.openxmlformats.org/officeDocument/2006/math" xmlns="" val="1"/>
+              <ma14:wrappingTextBoxFlag xmlns="" xmlns:m="http://schemas.openxmlformats.org/officeDocument/2006/math" xmlns:a14="http://schemas.microsoft.com/office/drawing/2010/main" xmlns:ma14="http://schemas.microsoft.com/office/mac/drawingml/2011/main" val="1"/>
             </a:ext>
           </a:extLst>
         </p:spPr>
@@ -6517,7 +6521,7 @@
           </a:ln>
           <a:extLst>
             <a:ext uri="{C572A759-6A51-4108-AA02-DFA0A04FC94B}">
-              <ma14:wrappingTextBoxFlag xmlns:ma14="http://schemas.microsoft.com/office/mac/drawingml/2011/main" xmlns:a14="http://schemas.microsoft.com/office/drawing/2010/main" xmlns:m="http://schemas.openxmlformats.org/officeDocument/2006/math" xmlns="" val="1"/>
+              <ma14:wrappingTextBoxFlag xmlns="" xmlns:m="http://schemas.openxmlformats.org/officeDocument/2006/math" xmlns:a14="http://schemas.microsoft.com/office/drawing/2010/main" xmlns:ma14="http://schemas.microsoft.com/office/mac/drawingml/2011/main" val="1"/>
             </a:ext>
           </a:extLst>
         </p:spPr>
@@ -6575,7 +6579,7 @@
           </a:ln>
           <a:extLst>
             <a:ext uri="{C572A759-6A51-4108-AA02-DFA0A04FC94B}">
-              <ma14:wrappingTextBoxFlag xmlns:ma14="http://schemas.microsoft.com/office/mac/drawingml/2011/main" xmlns:a14="http://schemas.microsoft.com/office/drawing/2010/main" xmlns:m="http://schemas.openxmlformats.org/officeDocument/2006/math" xmlns="" val="1"/>
+              <ma14:wrappingTextBoxFlag xmlns="" xmlns:m="http://schemas.openxmlformats.org/officeDocument/2006/math" xmlns:a14="http://schemas.microsoft.com/office/drawing/2010/main" xmlns:ma14="http://schemas.microsoft.com/office/mac/drawingml/2011/main" val="1"/>
             </a:ext>
           </a:extLst>
         </p:spPr>
@@ -6629,7 +6633,7 @@
           </a:ln>
           <a:extLst>
             <a:ext uri="{C572A759-6A51-4108-AA02-DFA0A04FC94B}">
-              <ma14:wrappingTextBoxFlag xmlns:ma14="http://schemas.microsoft.com/office/mac/drawingml/2011/main" xmlns:a14="http://schemas.microsoft.com/office/drawing/2010/main" xmlns:m="http://schemas.openxmlformats.org/officeDocument/2006/math" xmlns="" val="1"/>
+              <ma14:wrappingTextBoxFlag xmlns="" xmlns:m="http://schemas.openxmlformats.org/officeDocument/2006/math" xmlns:a14="http://schemas.microsoft.com/office/drawing/2010/main" xmlns:ma14="http://schemas.microsoft.com/office/mac/drawingml/2011/main" val="1"/>
             </a:ext>
           </a:extLst>
         </p:spPr>
@@ -6683,7 +6687,7 @@
           </a:ln>
           <a:extLst>
             <a:ext uri="{C572A759-6A51-4108-AA02-DFA0A04FC94B}">
-              <ma14:wrappingTextBoxFlag xmlns:ma14="http://schemas.microsoft.com/office/mac/drawingml/2011/main" xmlns:a14="http://schemas.microsoft.com/office/drawing/2010/main" xmlns:m="http://schemas.openxmlformats.org/officeDocument/2006/math" xmlns="" val="1"/>
+              <ma14:wrappingTextBoxFlag xmlns="" xmlns:m="http://schemas.openxmlformats.org/officeDocument/2006/math" xmlns:a14="http://schemas.microsoft.com/office/drawing/2010/main" xmlns:ma14="http://schemas.microsoft.com/office/mac/drawingml/2011/main" val="1"/>
             </a:ext>
           </a:extLst>
         </p:spPr>
@@ -6735,7 +6739,7 @@
           </a:ln>
           <a:extLst>
             <a:ext uri="{C572A759-6A51-4108-AA02-DFA0A04FC94B}">
-              <ma14:wrappingTextBoxFlag xmlns:ma14="http://schemas.microsoft.com/office/mac/drawingml/2011/main" xmlns:a14="http://schemas.microsoft.com/office/drawing/2010/main" xmlns:m="http://schemas.openxmlformats.org/officeDocument/2006/math" xmlns="" val="1"/>
+              <ma14:wrappingTextBoxFlag xmlns="" xmlns:m="http://schemas.openxmlformats.org/officeDocument/2006/math" xmlns:a14="http://schemas.microsoft.com/office/drawing/2010/main" xmlns:ma14="http://schemas.microsoft.com/office/mac/drawingml/2011/main" val="1"/>
             </a:ext>
           </a:extLst>
         </p:spPr>
@@ -6818,7 +6822,7 @@
           </a:ln>
           <a:extLst>
             <a:ext uri="{C572A759-6A51-4108-AA02-DFA0A04FC94B}">
-              <ma14:wrappingTextBoxFlag xmlns:ma14="http://schemas.microsoft.com/office/mac/drawingml/2011/main" xmlns:a14="http://schemas.microsoft.com/office/drawing/2010/main" xmlns:m="http://schemas.openxmlformats.org/officeDocument/2006/math" xmlns="" val="1"/>
+              <ma14:wrappingTextBoxFlag xmlns="" xmlns:m="http://schemas.openxmlformats.org/officeDocument/2006/math" xmlns:a14="http://schemas.microsoft.com/office/drawing/2010/main" xmlns:ma14="http://schemas.microsoft.com/office/mac/drawingml/2011/main" val="1"/>
             </a:ext>
           </a:extLst>
         </p:spPr>
@@ -6981,7 +6985,7 @@
           </a:ln>
           <a:extLst>
             <a:ext uri="{C572A759-6A51-4108-AA02-DFA0A04FC94B}">
-              <ma14:wrappingTextBoxFlag xmlns:ma14="http://schemas.microsoft.com/office/mac/drawingml/2011/main" xmlns:a14="http://schemas.microsoft.com/office/drawing/2010/main" xmlns:m="http://schemas.openxmlformats.org/officeDocument/2006/math" xmlns="" val="1"/>
+              <ma14:wrappingTextBoxFlag xmlns="" xmlns:m="http://schemas.openxmlformats.org/officeDocument/2006/math" xmlns:a14="http://schemas.microsoft.com/office/drawing/2010/main" xmlns:ma14="http://schemas.microsoft.com/office/mac/drawingml/2011/main" val="1"/>
             </a:ext>
           </a:extLst>
         </p:spPr>
@@ -7035,7 +7039,7 @@
           </a:ln>
           <a:extLst>
             <a:ext uri="{C572A759-6A51-4108-AA02-DFA0A04FC94B}">
-              <ma14:wrappingTextBoxFlag xmlns:ma14="http://schemas.microsoft.com/office/mac/drawingml/2011/main" xmlns:a14="http://schemas.microsoft.com/office/drawing/2010/main" xmlns:m="http://schemas.openxmlformats.org/officeDocument/2006/math" xmlns="" val="1"/>
+              <ma14:wrappingTextBoxFlag xmlns="" xmlns:m="http://schemas.openxmlformats.org/officeDocument/2006/math" xmlns:a14="http://schemas.microsoft.com/office/drawing/2010/main" xmlns:ma14="http://schemas.microsoft.com/office/mac/drawingml/2011/main" val="1"/>
             </a:ext>
           </a:extLst>
         </p:spPr>
@@ -7101,7 +7105,7 @@
           </a:ln>
           <a:extLst>
             <a:ext uri="{C572A759-6A51-4108-AA02-DFA0A04FC94B}">
-              <ma14:wrappingTextBoxFlag xmlns:ma14="http://schemas.microsoft.com/office/mac/drawingml/2011/main" xmlns:a14="http://schemas.microsoft.com/office/drawing/2010/main" xmlns:m="http://schemas.openxmlformats.org/officeDocument/2006/math" xmlns="" val="1"/>
+              <ma14:wrappingTextBoxFlag xmlns="" xmlns:m="http://schemas.openxmlformats.org/officeDocument/2006/math" xmlns:a14="http://schemas.microsoft.com/office/drawing/2010/main" xmlns:ma14="http://schemas.microsoft.com/office/mac/drawingml/2011/main" val="1"/>
             </a:ext>
           </a:extLst>
         </p:spPr>
@@ -7159,7 +7163,7 @@
           </a:ln>
           <a:extLst>
             <a:ext uri="{C572A759-6A51-4108-AA02-DFA0A04FC94B}">
-              <ma14:wrappingTextBoxFlag xmlns:ma14="http://schemas.microsoft.com/office/mac/drawingml/2011/main" xmlns:a14="http://schemas.microsoft.com/office/drawing/2010/main" xmlns:m="http://schemas.openxmlformats.org/officeDocument/2006/math" xmlns="" val="1"/>
+              <ma14:wrappingTextBoxFlag xmlns="" xmlns:m="http://schemas.openxmlformats.org/officeDocument/2006/math" xmlns:a14="http://schemas.microsoft.com/office/drawing/2010/main" xmlns:ma14="http://schemas.microsoft.com/office/mac/drawingml/2011/main" val="1"/>
             </a:ext>
           </a:extLst>
         </p:spPr>
@@ -7213,7 +7217,7 @@
           </a:ln>
           <a:extLst>
             <a:ext uri="{C572A759-6A51-4108-AA02-DFA0A04FC94B}">
-              <ma14:wrappingTextBoxFlag xmlns:ma14="http://schemas.microsoft.com/office/mac/drawingml/2011/main" xmlns:a14="http://schemas.microsoft.com/office/drawing/2010/main" xmlns:m="http://schemas.openxmlformats.org/officeDocument/2006/math" xmlns="" val="1"/>
+              <ma14:wrappingTextBoxFlag xmlns="" xmlns:m="http://schemas.openxmlformats.org/officeDocument/2006/math" xmlns:a14="http://schemas.microsoft.com/office/drawing/2010/main" xmlns:ma14="http://schemas.microsoft.com/office/mac/drawingml/2011/main" val="1"/>
             </a:ext>
           </a:extLst>
         </p:spPr>
@@ -7267,7 +7271,7 @@
           </a:ln>
           <a:extLst>
             <a:ext uri="{C572A759-6A51-4108-AA02-DFA0A04FC94B}">
-              <ma14:wrappingTextBoxFlag xmlns:ma14="http://schemas.microsoft.com/office/mac/drawingml/2011/main" xmlns:a14="http://schemas.microsoft.com/office/drawing/2010/main" xmlns:m="http://schemas.openxmlformats.org/officeDocument/2006/math" xmlns="" val="1"/>
+              <ma14:wrappingTextBoxFlag xmlns="" xmlns:m="http://schemas.openxmlformats.org/officeDocument/2006/math" xmlns:a14="http://schemas.microsoft.com/office/drawing/2010/main" xmlns:ma14="http://schemas.microsoft.com/office/mac/drawingml/2011/main" val="1"/>
             </a:ext>
           </a:extLst>
         </p:spPr>
@@ -7321,7 +7325,7 @@
           </a:ln>
           <a:extLst>
             <a:ext uri="{C572A759-6A51-4108-AA02-DFA0A04FC94B}">
-              <ma14:wrappingTextBoxFlag xmlns:ma14="http://schemas.microsoft.com/office/mac/drawingml/2011/main" xmlns:a14="http://schemas.microsoft.com/office/drawing/2010/main" xmlns:m="http://schemas.openxmlformats.org/officeDocument/2006/math" xmlns="" val="1"/>
+              <ma14:wrappingTextBoxFlag xmlns="" xmlns:m="http://schemas.openxmlformats.org/officeDocument/2006/math" xmlns:a14="http://schemas.microsoft.com/office/drawing/2010/main" xmlns:ma14="http://schemas.microsoft.com/office/mac/drawingml/2011/main" val="1"/>
             </a:ext>
           </a:extLst>
         </p:spPr>
@@ -7371,7 +7375,7 @@
           </a:ln>
           <a:extLst>
             <a:ext uri="{C572A759-6A51-4108-AA02-DFA0A04FC94B}">
-              <ma14:wrappingTextBoxFlag xmlns:ma14="http://schemas.microsoft.com/office/mac/drawingml/2011/main" xmlns:a14="http://schemas.microsoft.com/office/drawing/2010/main" xmlns:m="http://schemas.openxmlformats.org/officeDocument/2006/math" xmlns="" val="1"/>
+              <ma14:wrappingTextBoxFlag xmlns="" xmlns:m="http://schemas.openxmlformats.org/officeDocument/2006/math" xmlns:a14="http://schemas.microsoft.com/office/drawing/2010/main" xmlns:ma14="http://schemas.microsoft.com/office/mac/drawingml/2011/main" val="1"/>
             </a:ext>
           </a:extLst>
         </p:spPr>
@@ -7454,7 +7458,7 @@
           </a:ln>
           <a:extLst>
             <a:ext uri="{C572A759-6A51-4108-AA02-DFA0A04FC94B}">
-              <ma14:wrappingTextBoxFlag xmlns:ma14="http://schemas.microsoft.com/office/mac/drawingml/2011/main" xmlns:a14="http://schemas.microsoft.com/office/drawing/2010/main" xmlns:m="http://schemas.openxmlformats.org/officeDocument/2006/math" xmlns="" val="1"/>
+              <ma14:wrappingTextBoxFlag xmlns="" xmlns:m="http://schemas.openxmlformats.org/officeDocument/2006/math" xmlns:a14="http://schemas.microsoft.com/office/drawing/2010/main" xmlns:ma14="http://schemas.microsoft.com/office/mac/drawingml/2011/main" val="1"/>
             </a:ext>
           </a:extLst>
         </p:spPr>
@@ -7526,7 +7530,7 @@
           </a:ln>
           <a:extLst>
             <a:ext uri="{C572A759-6A51-4108-AA02-DFA0A04FC94B}">
-              <ma14:wrappingTextBoxFlag xmlns:ma14="http://schemas.microsoft.com/office/mac/drawingml/2011/main" xmlns:a14="http://schemas.microsoft.com/office/drawing/2010/main" xmlns:m="http://schemas.openxmlformats.org/officeDocument/2006/math" xmlns="" val="1"/>
+              <ma14:wrappingTextBoxFlag xmlns="" xmlns:m="http://schemas.openxmlformats.org/officeDocument/2006/math" xmlns:a14="http://schemas.microsoft.com/office/drawing/2010/main" xmlns:ma14="http://schemas.microsoft.com/office/mac/drawingml/2011/main" val="1"/>
             </a:ext>
           </a:extLst>
         </p:spPr>
